--- a/docs/GlowUp.pptx
+++ b/docs/GlowUp.pptx
@@ -3665,7 +3665,7 @@
                 <a:ea typeface="Calibri" pitchFamily="34" charset="-122"/>
                 <a:cs typeface="Calibri" pitchFamily="34" charset="-120"/>
               </a:rPr>
-              <a:t>Track sales volume, bookings, and platform activity.</a:t>
+              <a:t>Track appointments, users, services, and reports.</a:t>
             </a:r>
             <a:endParaRPr lang="en-US" sz="1200" dirty="0"/>
           </a:p>
